--- a/resources/year8/L7_Perpendicular_Lines.pptx
+++ b/resources/year8/L7_Perpendicular_Lines.pptx
@@ -9765,8 +9765,8 @@
         </p:nvSpPr>
         <p:spPr>
           <a:xfrm>
-            <a:off x="457200" y="777240"/>
-            <a:ext cx="11277295" cy="640080"/>
+            <a:off x="457200" y="685800"/>
+            <a:ext cx="11277295" cy="457200"/>
           </a:xfrm>
           <a:prstGeom prst="rect">
             <a:avLst/>
@@ -9788,7 +9788,7 @@
               </a:spcAft>
             </a:pPr>
             <a:r>
-              <a:rPr sz="3400" b="1" i="0">
+              <a:rPr sz="2800" b="1" i="0">
                 <a:solidFill>
                   <a:srgbClr val="000000"/>
                 </a:solidFill>
@@ -9807,8 +9807,8 @@
         </p:nvSpPr>
         <p:spPr>
           <a:xfrm>
-            <a:off x="457200" y="1645920"/>
-            <a:ext cx="11277295" cy="2926080"/>
+            <a:off x="457200" y="1170432"/>
+            <a:ext cx="11277295" cy="502920"/>
           </a:xfrm>
           <a:prstGeom prst="rect">
             <a:avLst/>
@@ -9826,69 +9826,295 @@
                 <a:spcPts val="0"/>
               </a:spcBef>
               <a:spcAft>
-                <a:spcPts val="1200"/>
+                <a:spcPts val="0"/>
               </a:spcAft>
             </a:pPr>
             <a:r>
-              <a:rPr sz="2200" b="0" i="0">
+              <a:rPr sz="1300" b="0" i="1">
+                <a:solidFill>
+                  <a:srgbClr val="595959"/>
+                </a:solidFill>
+                <a:latin typeface="Arial"/>
+              </a:rPr>
+              <a:t>Multiply each gradient pair on your whiteboard — if the answer is -1, they're perpendicular!</a:t>
+            </a:r>
+          </a:p>
+        </p:txBody>
+      </p:sp>
+      <p:sp>
+        <p:nvSpPr>
+          <p:cNvPr id="6" name="TextBox 5"/>
+          <p:cNvSpPr txBox="1"/>
+          <p:nvPr/>
+        </p:nvSpPr>
+        <p:spPr>
+          <a:xfrm>
+            <a:off x="457200" y="1874519"/>
+            <a:ext cx="5455767" cy="1295400"/>
+          </a:xfrm>
+          <a:prstGeom prst="rect">
+            <a:avLst/>
+          </a:prstGeom>
+          <a:noFill/>
+        </p:spPr>
+        <p:txBody>
+          <a:bodyPr wrap="square" anchor="ctr" lIns="0" rIns="0" tIns="0" bIns="0">
+            <a:spAutoFit/>
+          </a:bodyPr>
+          <a:lstStyle/>
+          <a:p>
+            <a:pPr algn="l"/>
+            <a:r>
+              <a:rPr sz="1500" b="1" i="0">
                 <a:solidFill>
                   <a:srgbClr val="000000"/>
                 </a:solidFill>
                 <a:latin typeface="Arial"/>
               </a:rPr>
-              <a:t>-  The teacher gives a pair of gradients.</a:t>
-            </a:r>
-          </a:p>
-          <a:p>
-            <a:pPr algn="l">
-              <a:spcBef>
-                <a:spcPts val="0"/>
-              </a:spcBef>
-              <a:spcAft>
-                <a:spcPts val="1200"/>
-              </a:spcAft>
-            </a:pPr>
-            <a:r>
-              <a:rPr sz="2200" b="0" i="0">
+              <a:t>1. m = 2 &amp; m = -0.5   </a:t>
+            </a:r>
+            <a:r>
+              <a:rPr sz="1500" b="1" i="0">
+                <a:solidFill>
+                  <a:srgbClr val="2B6B3D"/>
+                </a:solidFill>
+                <a:latin typeface="Arial"/>
+              </a:rPr>
+              <a:t>Perpendicular (2 x -0.5 = -1)</a:t>
+            </a:r>
+          </a:p>
+        </p:txBody>
+      </p:sp>
+      <p:sp>
+        <p:nvSpPr>
+          <p:cNvPr id="7" name="TextBox 6"/>
+          <p:cNvSpPr txBox="1"/>
+          <p:nvPr/>
+        </p:nvSpPr>
+        <p:spPr>
+          <a:xfrm>
+            <a:off x="457200" y="3169919"/>
+            <a:ext cx="5455767" cy="1295400"/>
+          </a:xfrm>
+          <a:prstGeom prst="rect">
+            <a:avLst/>
+          </a:prstGeom>
+          <a:noFill/>
+        </p:spPr>
+        <p:txBody>
+          <a:bodyPr wrap="square" anchor="ctr" lIns="0" rIns="0" tIns="0" bIns="0">
+            <a:spAutoFit/>
+          </a:bodyPr>
+          <a:lstStyle/>
+          <a:p>
+            <a:pPr algn="l"/>
+            <a:r>
+              <a:rPr sz="1500" b="1" i="0">
                 <a:solidFill>
                   <a:srgbClr val="000000"/>
                 </a:solidFill>
                 <a:latin typeface="Arial"/>
               </a:rPr>
-              <a:t>-  Multiply them on your whiteboard — if the answer is -1, they're perpendicular!</a:t>
-            </a:r>
-          </a:p>
-          <a:p>
-            <a:pPr algn="l">
-              <a:spcBef>
-                <a:spcPts val="0"/>
-              </a:spcBef>
-              <a:spcAft>
-                <a:spcPts val="1200"/>
-              </a:spcAft>
-            </a:pPr>
-            <a:r>
-              <a:rPr sz="2200" b="0" i="0">
+              <a:t>2. m = 3 &amp; m = -1/3   </a:t>
+            </a:r>
+            <a:r>
+              <a:rPr sz="1500" b="1" i="0">
+                <a:solidFill>
+                  <a:srgbClr val="2B6B3D"/>
+                </a:solidFill>
+                <a:latin typeface="Arial"/>
+              </a:rPr>
+              <a:t>Perpendicular (3 x -1/3 = -1)</a:t>
+            </a:r>
+          </a:p>
+        </p:txBody>
+      </p:sp>
+      <p:sp>
+        <p:nvSpPr>
+          <p:cNvPr id="8" name="TextBox 7"/>
+          <p:cNvSpPr txBox="1"/>
+          <p:nvPr/>
+        </p:nvSpPr>
+        <p:spPr>
+          <a:xfrm>
+            <a:off x="457200" y="4465319"/>
+            <a:ext cx="5455767" cy="1295400"/>
+          </a:xfrm>
+          <a:prstGeom prst="rect">
+            <a:avLst/>
+          </a:prstGeom>
+          <a:noFill/>
+        </p:spPr>
+        <p:txBody>
+          <a:bodyPr wrap="square" anchor="ctr" lIns="0" rIns="0" tIns="0" bIns="0">
+            <a:spAutoFit/>
+          </a:bodyPr>
+          <a:lstStyle/>
+          <a:p>
+            <a:pPr algn="l"/>
+            <a:r>
+              <a:rPr sz="1500" b="1" i="0">
                 <a:solidFill>
                   <a:srgbClr val="000000"/>
                 </a:solidFill>
                 <a:latin typeface="Arial"/>
               </a:rPr>
-              <a:t>-  Bonus round: given one gradient, find its perpendicular partner on the spot.</a:t>
-            </a:r>
-          </a:p>
-        </p:txBody>
-      </p:sp>
-      <p:sp>
-        <p:nvSpPr>
-          <p:cNvPr id="6" name="Rounded Rectangle 5"/>
+              <a:t>3. m = 4 &amp; m = 0.25   </a:t>
+            </a:r>
+            <a:r>
+              <a:rPr sz="1500" b="1" i="0">
+                <a:solidFill>
+                  <a:srgbClr val="2B6B3D"/>
+                </a:solidFill>
+                <a:latin typeface="Arial"/>
+              </a:rPr>
+              <a:t>Not perpendicular (4 x 0.25 = 1)</a:t>
+            </a:r>
+          </a:p>
+        </p:txBody>
+      </p:sp>
+      <p:sp>
+        <p:nvSpPr>
+          <p:cNvPr id="9" name="TextBox 8"/>
+          <p:cNvSpPr txBox="1"/>
+          <p:nvPr/>
+        </p:nvSpPr>
+        <p:spPr>
+          <a:xfrm>
+            <a:off x="6278727" y="1874519"/>
+            <a:ext cx="5455767" cy="1295400"/>
+          </a:xfrm>
+          <a:prstGeom prst="rect">
+            <a:avLst/>
+          </a:prstGeom>
+          <a:noFill/>
+        </p:spPr>
+        <p:txBody>
+          <a:bodyPr wrap="square" anchor="ctr" lIns="0" rIns="0" tIns="0" bIns="0">
+            <a:spAutoFit/>
+          </a:bodyPr>
+          <a:lstStyle/>
+          <a:p>
+            <a:pPr algn="l"/>
+            <a:r>
+              <a:rPr sz="1500" b="1" i="0">
+                <a:solidFill>
+                  <a:srgbClr val="000000"/>
+                </a:solidFill>
+                <a:latin typeface="Arial"/>
+              </a:rPr>
+              <a:t>4. m = -2 &amp; m = 0.5   </a:t>
+            </a:r>
+            <a:r>
+              <a:rPr sz="1500" b="1" i="0">
+                <a:solidFill>
+                  <a:srgbClr val="2B6B3D"/>
+                </a:solidFill>
+                <a:latin typeface="Arial"/>
+              </a:rPr>
+              <a:t>Perpendicular (-2 x 0.5 = -1)</a:t>
+            </a:r>
+          </a:p>
+        </p:txBody>
+      </p:sp>
+      <p:sp>
+        <p:nvSpPr>
+          <p:cNvPr id="10" name="TextBox 9"/>
+          <p:cNvSpPr txBox="1"/>
+          <p:nvPr/>
+        </p:nvSpPr>
+        <p:spPr>
+          <a:xfrm>
+            <a:off x="6278727" y="3169919"/>
+            <a:ext cx="5455767" cy="1295400"/>
+          </a:xfrm>
+          <a:prstGeom prst="rect">
+            <a:avLst/>
+          </a:prstGeom>
+          <a:noFill/>
+        </p:spPr>
+        <p:txBody>
+          <a:bodyPr wrap="square" anchor="ctr" lIns="0" rIns="0" tIns="0" bIns="0">
+            <a:spAutoFit/>
+          </a:bodyPr>
+          <a:lstStyle/>
+          <a:p>
+            <a:pPr algn="l"/>
+            <a:r>
+              <a:rPr sz="1500" b="1" i="0">
+                <a:solidFill>
+                  <a:srgbClr val="000000"/>
+                </a:solidFill>
+                <a:latin typeface="Arial"/>
+              </a:rPr>
+              <a:t>5. m = 5 &amp; m = -5   </a:t>
+            </a:r>
+            <a:r>
+              <a:rPr sz="1500" b="1" i="0">
+                <a:solidFill>
+                  <a:srgbClr val="2B6B3D"/>
+                </a:solidFill>
+                <a:latin typeface="Arial"/>
+              </a:rPr>
+              <a:t>Not perpendicular (5 x -5 = -25)</a:t>
+            </a:r>
+          </a:p>
+        </p:txBody>
+      </p:sp>
+      <p:sp>
+        <p:nvSpPr>
+          <p:cNvPr id="11" name="TextBox 10"/>
+          <p:cNvSpPr txBox="1"/>
+          <p:nvPr/>
+        </p:nvSpPr>
+        <p:spPr>
+          <a:xfrm>
+            <a:off x="6278727" y="4465319"/>
+            <a:ext cx="5455767" cy="1295400"/>
+          </a:xfrm>
+          <a:prstGeom prst="rect">
+            <a:avLst/>
+          </a:prstGeom>
+          <a:noFill/>
+        </p:spPr>
+        <p:txBody>
+          <a:bodyPr wrap="square" anchor="ctr" lIns="0" rIns="0" tIns="0" bIns="0">
+            <a:spAutoFit/>
+          </a:bodyPr>
+          <a:lstStyle/>
+          <a:p>
+            <a:pPr algn="l"/>
+            <a:r>
+              <a:rPr sz="1500" b="1" i="0">
+                <a:solidFill>
+                  <a:srgbClr val="000000"/>
+                </a:solidFill>
+                <a:latin typeface="Arial"/>
+              </a:rPr>
+              <a:t>6. m = 1 &amp; m = -1   </a:t>
+            </a:r>
+            <a:r>
+              <a:rPr sz="1500" b="1" i="0">
+                <a:solidFill>
+                  <a:srgbClr val="2B6B3D"/>
+                </a:solidFill>
+                <a:latin typeface="Arial"/>
+              </a:rPr>
+              <a:t>Perpendicular (1 x -1 = -1)</a:t>
+            </a:r>
+          </a:p>
+        </p:txBody>
+      </p:sp>
+      <p:sp>
+        <p:nvSpPr>
+          <p:cNvPr id="12" name="Rounded Rectangle 11"/>
           <p:cNvSpPr/>
           <p:nvPr/>
         </p:nvSpPr>
         <p:spPr>
           <a:xfrm>
-            <a:off x="457200" y="4937760"/>
-            <a:ext cx="11277295" cy="1097280"/>
+            <a:off x="457200" y="5897880"/>
+            <a:ext cx="11277295" cy="548640"/>
           </a:xfrm>
           <a:prstGeom prst="roundRect">
             <a:avLst/>
@@ -9923,7 +10149,7 @@
           <a:p>
             <a:pPr algn="ctr"/>
             <a:r>
-              <a:rPr sz="2200" b="1" i="0">
+              <a:rPr sz="1600" b="1" i="0">
                 <a:solidFill>
                   <a:srgbClr val="000000"/>
                 </a:solidFill>
@@ -9936,7 +10162,7 @@
       </p:sp>
       <p:sp>
         <p:nvSpPr>
-          <p:cNvPr id="7" name="TextBox 6"/>
+          <p:cNvPr id="13" name="TextBox 12"/>
           <p:cNvSpPr txBox="1"/>
           <p:nvPr/>
         </p:nvSpPr>
